--- a/demo-artifacts/customer-roleplay-presentation.pptx
+++ b/demo-artifacts/customer-roleplay-presentation.pptx
@@ -25,6 +25,7 @@
     <p:sldId id="273" r:id="rId25"/>
     <p:sldId id="274" r:id="rId26"/>
     <p:sldId id="275" r:id="rId27"/>
+    <p:sldId id="276" r:id="rId28"/>
   </p:sldIdLst>
   <p:sldSz cx="12191695" cy="6858000" type="screen4x3"/>
   <p:notesSz cx="6858000" cy="9144000"/>
@@ -532,7 +533,7 @@
           </a:p>
           <a:p>
             <a:r>
-              <a:t>At Lumen's scale, a two-to-two-and-a-half percent leakage rate represents roughly $250 million to $312 million a year. That is not one broken billing rule — it is value escaping between systems that are each locally correct: sales, contracts, provisioning, billing, finance, and collections. We built a working revenue-assurance solution for Lakelink Fiber, a fictional carrier with realistic telecom data and operating patterns. No Lumen customer data is used.</a:t>
+              <a:t>Lumen reported $12.4 billion in total revenue for fiscal year 2025 — that's from your own 10-K, filed February 20, 2026, not an estimate. Apply a conservative industry leakage assumption of two to two-and-a-half percent, bounded by PwC's published one-to-five-percent range for telecom revenue leakage, and that's roughly $248 million to $310 million a year of exposure. That is not one broken billing rule — it is value escaping between systems that are each locally correct: sales, contracts, provisioning, billing, finance, and collections. I want to be direct about what kind of number this is: it's your real revenue multiplied by an external industry assumption, not a measurement of your actual leakage — full sources and formulas are in Appendix F. We built a working revenue-assurance solution for Lakelink Fiber, a fictional carrier with realistic telecom data and operating patterns. No Lumen customer data is used.</a:t>
             </a:r>
           </a:p>
           <a:p/>
@@ -648,6 +649,17 @@
               <a:t>- Open one live workspace or catalog link if stable.</a:t>
             </a:r>
           </a:p>
+          <a:p/>
+          <a:p>
+            <a:r>
+              <a:t>If this surface stalls &gt;10s:</a:t>
+            </a:r>
+          </a:p>
+          <a:p>
+            <a:r>
+              <a:t>Named fallback: ra_demo_fallback.pdf (architecture-tour slide). Recovery script: narrate the seven-step tour from the static diagram; skip the "open in workspace" link.</a:t>
+            </a:r>
+          </a:p>
         </p:txBody>
       </p:sp>
       <p:sp>
@@ -729,6 +741,17 @@
               <a:t>AI is not replacing the control framework. It is extending the kinds of evidence the framework can evaluate. The output still lands in named, governed, reviewable surfaces.</a:t>
             </a:r>
           </a:p>
+          <a:p/>
+          <a:p>
+            <a:r>
+              <a:t>If this surface stalls &gt;10s:</a:t>
+            </a:r>
+          </a:p>
+          <a:p>
+            <a:r>
+              <a:t>Named fallback: pre-run Genie screenshot in ra_demo_fallback.pdf. Recovery script: "Here's the same question answered a moment ago" — read the pre-captured answer verbatim.</a:t>
+            </a:r>
+          </a:p>
         </p:txBody>
       </p:sp>
       <p:sp>
@@ -969,7 +992,7 @@
           </a:p>
           <a:p>
             <a:r>
-              <a:t>Let me leave you with the business progression. Leakage stops being an opinion and becomes a register. Nobody recovers all of the gross leakage — a defensible planning range is $125 million to $220 million of recovered and prevented revenue over a phased 12-to-24-month program, subject to validation on Lumen data.</a:t>
+              <a:t>Let me leave you with the business progression. Leakage stops being an opinion and becomes a register. Using Lumen's own reported FY2025 revenue of $12.4 billion and a conservative two-to-two-and-a-half-percent industry leakage assumption, gross exposure lands at $248 million to $310 million. Nobody recovers all of the gross leakage — applying a fifty-to-seventy-percent industry recovery-rate assumption, a defensible planning range is $124 million to $217 million of recovered and prevented revenue over a phased 12-to-24-month program, subject to validation on Lumen data.</a:t>
             </a:r>
           </a:p>
         </p:txBody>
@@ -1040,12 +1063,296 @@
           <a:p/>
           <a:p>
             <a:r>
+              <a:t>Note: Reference-only appendix slide — no talk track. The on-slide Q&amp;A text is the speaker note; read it directly if the objection comes up.</a:t>
+            </a:r>
+          </a:p>
+        </p:txBody>
+      </p:sp>
+      <p:sp>
+        <p:nvSpPr>
+          <p:cNvPr id="4" name="Slide Number Placeholder 3"/>
+          <p:cNvSpPr>
+            <a:spLocks noGrp="1"/>
+          </p:cNvSpPr>
+          <p:nvPr>
+            <p:ph type="sldNum" idx="5" sz="quarter"/>
+          </p:nvPr>
+        </p:nvSpPr>
+        <p:spPr/>
+      </p:sp>
+    </p:spTree>
+  </p:cSld>
+  <p:clrMapOvr>
+    <a:masterClrMapping/>
+  </p:clrMapOvr>
+</p:notes>
+</file>
+
+<file path=ppt/notesSlides/notesSlide16.xml><?xml version="1.0" encoding="utf-8"?>
+<p:notes xmlns:a="http://schemas.openxmlformats.org/drawingml/2006/main" xmlns:p="http://schemas.openxmlformats.org/presentationml/2006/main" xmlns:r="http://schemas.openxmlformats.org/officeDocument/2006/relationships">
+  <p:cSld>
+    <p:spTree>
+      <p:nvGrpSpPr>
+        <p:cNvPr id="1" name=""/>
+        <p:cNvGrpSpPr/>
+        <p:nvPr/>
+      </p:nvGrpSpPr>
+      <p:grpSpPr>
+        <a:xfrm>
+          <a:off x="0" y="0"/>
+          <a:ext cx="0" cy="0"/>
+          <a:chOff x="0" y="0"/>
+          <a:chExt cx="0" cy="0"/>
+        </a:xfrm>
+      </p:grpSpPr>
+      <p:sp>
+        <p:nvSpPr>
+          <p:cNvPr id="2" name="Slide Image Placeholder 1"/>
+          <p:cNvSpPr>
+            <a:spLocks noGrp="1"/>
+          </p:cNvSpPr>
+          <p:nvPr>
+            <p:ph type="sldImg" idx="2"/>
+          </p:nvPr>
+        </p:nvSpPr>
+        <p:spPr/>
+      </p:sp>
+      <p:sp>
+        <p:nvSpPr>
+          <p:cNvPr id="3" name="Notes Placeholder 2"/>
+          <p:cNvSpPr>
+            <a:spLocks noGrp="1"/>
+          </p:cNvSpPr>
+          <p:nvPr>
+            <p:ph type="body" idx="3" sz="quarter"/>
+          </p:nvPr>
+        </p:nvSpPr>
+        <p:spPr/>
+        <p:txBody>
+          <a:bodyPr/>
+          <a:lstStyle/>
+          <a:p/>
+          <a:p>
+            <a:r>
+              <a:t>Note: Reference-only appendix slide — no talk track. The on-slide Q&amp;A text is the speaker note; read it directly if the objection comes up.</a:t>
+            </a:r>
+          </a:p>
+        </p:txBody>
+      </p:sp>
+      <p:sp>
+        <p:nvSpPr>
+          <p:cNvPr id="4" name="Slide Number Placeholder 3"/>
+          <p:cNvSpPr>
+            <a:spLocks noGrp="1"/>
+          </p:cNvSpPr>
+          <p:nvPr>
+            <p:ph type="sldNum" idx="5" sz="quarter"/>
+          </p:nvPr>
+        </p:nvSpPr>
+        <p:spPr/>
+      </p:sp>
+    </p:spTree>
+  </p:cSld>
+  <p:clrMapOvr>
+    <a:masterClrMapping/>
+  </p:clrMapOvr>
+</p:notes>
+</file>
+
+<file path=ppt/notesSlides/notesSlide17.xml><?xml version="1.0" encoding="utf-8"?>
+<p:notes xmlns:a="http://schemas.openxmlformats.org/drawingml/2006/main" xmlns:p="http://schemas.openxmlformats.org/presentationml/2006/main" xmlns:r="http://schemas.openxmlformats.org/officeDocument/2006/relationships">
+  <p:cSld>
+    <p:spTree>
+      <p:nvGrpSpPr>
+        <p:cNvPr id="1" name=""/>
+        <p:cNvGrpSpPr/>
+        <p:nvPr/>
+      </p:nvGrpSpPr>
+      <p:grpSpPr>
+        <a:xfrm>
+          <a:off x="0" y="0"/>
+          <a:ext cx="0" cy="0"/>
+          <a:chOff x="0" y="0"/>
+          <a:chExt cx="0" cy="0"/>
+        </a:xfrm>
+      </p:grpSpPr>
+      <p:sp>
+        <p:nvSpPr>
+          <p:cNvPr id="2" name="Slide Image Placeholder 1"/>
+          <p:cNvSpPr>
+            <a:spLocks noGrp="1"/>
+          </p:cNvSpPr>
+          <p:nvPr>
+            <p:ph type="sldImg" idx="2"/>
+          </p:nvPr>
+        </p:nvSpPr>
+        <p:spPr/>
+      </p:sp>
+      <p:sp>
+        <p:nvSpPr>
+          <p:cNvPr id="3" name="Notes Placeholder 2"/>
+          <p:cNvSpPr>
+            <a:spLocks noGrp="1"/>
+          </p:cNvSpPr>
+          <p:nvPr>
+            <p:ph type="body" idx="3" sz="quarter"/>
+          </p:nvPr>
+        </p:nvSpPr>
+        <p:spPr/>
+        <p:txBody>
+          <a:bodyPr/>
+          <a:lstStyle/>
+          <a:p/>
+          <a:p>
+            <a:r>
+              <a:t>Note: Reference-only appendix slide — no talk track. Use it to answer a scope question directly from the two lists if asked.</a:t>
+            </a:r>
+          </a:p>
+        </p:txBody>
+      </p:sp>
+      <p:sp>
+        <p:nvSpPr>
+          <p:cNvPr id="4" name="Slide Number Placeholder 3"/>
+          <p:cNvSpPr>
+            <a:spLocks noGrp="1"/>
+          </p:cNvSpPr>
+          <p:nvPr>
+            <p:ph type="sldNum" idx="5" sz="quarter"/>
+          </p:nvPr>
+        </p:nvSpPr>
+        <p:spPr/>
+      </p:sp>
+    </p:spTree>
+  </p:cSld>
+  <p:clrMapOvr>
+    <a:masterClrMapping/>
+  </p:clrMapOvr>
+</p:notes>
+</file>
+
+<file path=ppt/notesSlides/notesSlide18.xml><?xml version="1.0" encoding="utf-8"?>
+<p:notes xmlns:a="http://schemas.openxmlformats.org/drawingml/2006/main" xmlns:p="http://schemas.openxmlformats.org/presentationml/2006/main" xmlns:r="http://schemas.openxmlformats.org/officeDocument/2006/relationships">
+  <p:cSld>
+    <p:spTree>
+      <p:nvGrpSpPr>
+        <p:cNvPr id="1" name=""/>
+        <p:cNvGrpSpPr/>
+        <p:nvPr/>
+      </p:nvGrpSpPr>
+      <p:grpSpPr>
+        <a:xfrm>
+          <a:off x="0" y="0"/>
+          <a:ext cx="0" cy="0"/>
+          <a:chOff x="0" y="0"/>
+          <a:chExt cx="0" cy="0"/>
+        </a:xfrm>
+      </p:grpSpPr>
+      <p:sp>
+        <p:nvSpPr>
+          <p:cNvPr id="2" name="Slide Image Placeholder 1"/>
+          <p:cNvSpPr>
+            <a:spLocks noGrp="1"/>
+          </p:cNvSpPr>
+          <p:nvPr>
+            <p:ph type="sldImg" idx="2"/>
+          </p:nvPr>
+        </p:nvSpPr>
+        <p:spPr/>
+      </p:sp>
+      <p:sp>
+        <p:nvSpPr>
+          <p:cNvPr id="3" name="Notes Placeholder 2"/>
+          <p:cNvSpPr>
+            <a:spLocks noGrp="1"/>
+          </p:cNvSpPr>
+          <p:nvPr>
+            <p:ph type="body" idx="3" sz="quarter"/>
+          </p:nvPr>
+        </p:nvSpPr>
+        <p:spPr/>
+        <p:txBody>
+          <a:bodyPr/>
+          <a:lstStyle/>
+          <a:p/>
+          <a:p>
+            <a:r>
               <a:t>Talk track:</a:t>
             </a:r>
           </a:p>
           <a:p>
             <a:r>
               <a:t>We used AI as a teammate for breadth, speed, and independent challenge. We did not use it as the final authority. The implementer and reviewer were separated, acceptance criteria were explicit, and deterministic gates remained part of the process.</a:t>
+            </a:r>
+          </a:p>
+        </p:txBody>
+      </p:sp>
+      <p:sp>
+        <p:nvSpPr>
+          <p:cNvPr id="4" name="Slide Number Placeholder 3"/>
+          <p:cNvSpPr>
+            <a:spLocks noGrp="1"/>
+          </p:cNvSpPr>
+          <p:nvPr>
+            <p:ph type="sldNum" idx="5" sz="quarter"/>
+          </p:nvPr>
+        </p:nvSpPr>
+        <p:spPr/>
+      </p:sp>
+    </p:spTree>
+  </p:cSld>
+  <p:clrMapOvr>
+    <a:masterClrMapping/>
+  </p:clrMapOvr>
+</p:notes>
+</file>
+
+<file path=ppt/notesSlides/notesSlide19.xml><?xml version="1.0" encoding="utf-8"?>
+<p:notes xmlns:a="http://schemas.openxmlformats.org/drawingml/2006/main" xmlns:p="http://schemas.openxmlformats.org/presentationml/2006/main" xmlns:r="http://schemas.openxmlformats.org/officeDocument/2006/relationships">
+  <p:cSld>
+    <p:spTree>
+      <p:nvGrpSpPr>
+        <p:cNvPr id="1" name=""/>
+        <p:cNvGrpSpPr/>
+        <p:nvPr/>
+      </p:nvGrpSpPr>
+      <p:grpSpPr>
+        <a:xfrm>
+          <a:off x="0" y="0"/>
+          <a:ext cx="0" cy="0"/>
+          <a:chOff x="0" y="0"/>
+          <a:chExt cx="0" cy="0"/>
+        </a:xfrm>
+      </p:grpSpPr>
+      <p:sp>
+        <p:nvSpPr>
+          <p:cNvPr id="2" name="Slide Image Placeholder 1"/>
+          <p:cNvSpPr>
+            <a:spLocks noGrp="1"/>
+          </p:cNvSpPr>
+          <p:nvPr>
+            <p:ph type="sldImg" idx="2"/>
+          </p:nvPr>
+        </p:nvSpPr>
+        <p:spPr/>
+      </p:sp>
+      <p:sp>
+        <p:nvSpPr>
+          <p:cNvPr id="3" name="Notes Placeholder 2"/>
+          <p:cNvSpPr>
+            <a:spLocks noGrp="1"/>
+          </p:cNvSpPr>
+          <p:nvPr>
+            <p:ph type="body" idx="3" sz="quarter"/>
+          </p:nvPr>
+        </p:nvSpPr>
+        <p:spPr/>
+        <p:txBody>
+          <a:bodyPr/>
+          <a:lstStyle/>
+          <a:p/>
+          <a:p>
+            <a:r>
+              <a:t>Note: Reference-only appendix slide — no talk track. The on-slide table and compressed-route card are the content; read timings directly if asked.</a:t>
             </a:r>
           </a:p>
         </p:txBody>
@@ -1162,6 +1469,148 @@
 </p:notes>
 </file>
 
+<file path=ppt/notesSlides/notesSlide20.xml><?xml version="1.0" encoding="utf-8"?>
+<p:notes xmlns:a="http://schemas.openxmlformats.org/drawingml/2006/main" xmlns:p="http://schemas.openxmlformats.org/presentationml/2006/main" xmlns:r="http://schemas.openxmlformats.org/officeDocument/2006/relationships">
+  <p:cSld>
+    <p:spTree>
+      <p:nvGrpSpPr>
+        <p:cNvPr id="1" name=""/>
+        <p:cNvGrpSpPr/>
+        <p:nvPr/>
+      </p:nvGrpSpPr>
+      <p:grpSpPr>
+        <a:xfrm>
+          <a:off x="0" y="0"/>
+          <a:ext cx="0" cy="0"/>
+          <a:chOff x="0" y="0"/>
+          <a:chExt cx="0" cy="0"/>
+        </a:xfrm>
+      </p:grpSpPr>
+      <p:sp>
+        <p:nvSpPr>
+          <p:cNvPr id="2" name="Slide Image Placeholder 1"/>
+          <p:cNvSpPr>
+            <a:spLocks noGrp="1"/>
+          </p:cNvSpPr>
+          <p:nvPr>
+            <p:ph type="sldImg" idx="2"/>
+          </p:nvPr>
+        </p:nvSpPr>
+        <p:spPr/>
+      </p:sp>
+      <p:sp>
+        <p:nvSpPr>
+          <p:cNvPr id="3" name="Notes Placeholder 2"/>
+          <p:cNvSpPr>
+            <a:spLocks noGrp="1"/>
+          </p:cNvSpPr>
+          <p:nvPr>
+            <p:ph type="body" idx="3" sz="quarter"/>
+          </p:nvPr>
+        </p:nvSpPr>
+        <p:spPr/>
+        <p:txBody>
+          <a:bodyPr/>
+          <a:lstStyle/>
+          <a:p/>
+          <a:p>
+            <a:r>
+              <a:t>Note: Reference-only appendix slide — no talk track. This is a self-scoring checklist, not narrated content.</a:t>
+            </a:r>
+          </a:p>
+        </p:txBody>
+      </p:sp>
+      <p:sp>
+        <p:nvSpPr>
+          <p:cNvPr id="4" name="Slide Number Placeholder 3"/>
+          <p:cNvSpPr>
+            <a:spLocks noGrp="1"/>
+          </p:cNvSpPr>
+          <p:nvPr>
+            <p:ph type="sldNum" idx="5" sz="quarter"/>
+          </p:nvPr>
+        </p:nvSpPr>
+        <p:spPr/>
+      </p:sp>
+    </p:spTree>
+  </p:cSld>
+  <p:clrMapOvr>
+    <a:masterClrMapping/>
+  </p:clrMapOvr>
+</p:notes>
+</file>
+
+<file path=ppt/notesSlides/notesSlide21.xml><?xml version="1.0" encoding="utf-8"?>
+<p:notes xmlns:a="http://schemas.openxmlformats.org/drawingml/2006/main" xmlns:p="http://schemas.openxmlformats.org/presentationml/2006/main" xmlns:r="http://schemas.openxmlformats.org/officeDocument/2006/relationships">
+  <p:cSld>
+    <p:spTree>
+      <p:nvGrpSpPr>
+        <p:cNvPr id="1" name=""/>
+        <p:cNvGrpSpPr/>
+        <p:nvPr/>
+      </p:nvGrpSpPr>
+      <p:grpSpPr>
+        <a:xfrm>
+          <a:off x="0" y="0"/>
+          <a:ext cx="0" cy="0"/>
+          <a:chOff x="0" y="0"/>
+          <a:chExt cx="0" cy="0"/>
+        </a:xfrm>
+      </p:grpSpPr>
+      <p:sp>
+        <p:nvSpPr>
+          <p:cNvPr id="2" name="Slide Image Placeholder 1"/>
+          <p:cNvSpPr>
+            <a:spLocks noGrp="1"/>
+          </p:cNvSpPr>
+          <p:nvPr>
+            <p:ph type="sldImg" idx="2"/>
+          </p:nvPr>
+        </p:nvSpPr>
+        <p:spPr/>
+      </p:sp>
+      <p:sp>
+        <p:nvSpPr>
+          <p:cNvPr id="3" name="Notes Placeholder 2"/>
+          <p:cNvSpPr>
+            <a:spLocks noGrp="1"/>
+          </p:cNvSpPr>
+          <p:nvPr>
+            <p:ph type="body" idx="3" sz="quarter"/>
+          </p:nvPr>
+        </p:nvSpPr>
+        <p:spPr/>
+        <p:txBody>
+          <a:bodyPr/>
+          <a:lstStyle/>
+          <a:p/>
+          <a:p>
+            <a:r>
+              <a:t>Note: Reference-only appendix slide — no talk track by default. If challenged on "how do I know the value is real," pull this up and read the formula and citations directly rather than defending the number from memory.</a:t>
+            </a:r>
+          </a:p>
+        </p:txBody>
+      </p:sp>
+      <p:sp>
+        <p:nvSpPr>
+          <p:cNvPr id="4" name="Slide Number Placeholder 3"/>
+          <p:cNvSpPr>
+            <a:spLocks noGrp="1"/>
+          </p:cNvSpPr>
+          <p:nvPr>
+            <p:ph type="sldNum" idx="5" sz="quarter"/>
+          </p:nvPr>
+        </p:nvSpPr>
+        <p:spPr/>
+      </p:sp>
+    </p:spTree>
+  </p:cSld>
+  <p:clrMapOvr>
+    <a:masterClrMapping/>
+  </p:clrMapOvr>
+</p:notes>
+</file>
+
 <file path=ppt/notesSlides/notesSlide3.xml><?xml version="1.0" encoding="utf-8"?>
 <p:notes xmlns:a="http://schemas.openxmlformats.org/drawingml/2006/main" xmlns:p="http://schemas.openxmlformats.org/presentationml/2006/main" xmlns:r="http://schemas.openxmlformats.org/officeDocument/2006/relationships">
   <p:cSld>
@@ -1421,6 +1870,17 @@
               <a:t>Faster prioritization, a shared finance/sales/billing/collections definition, and exposure that can be tracked run over run.</a:t>
             </a:r>
           </a:p>
+          <a:p/>
+          <a:p>
+            <a:r>
+              <a:t>If this surface stalls &gt;10s:</a:t>
+            </a:r>
+          </a:p>
+          <a:p>
+            <a:r>
+              <a:t>Named fallback: ra_demo_fallback.pdf (KPI-tile slide). Recovery script: "Let me walk you through the numbers from our last verified run" — narrate the golden baseline (~$601.5M / ~48,108 exceptions) from 09-runbook.md section 2.4.</a:t>
+            </a:r>
+          </a:p>
         </p:txBody>
       </p:sp>
       <p:sp>
@@ -1518,6 +1978,17 @@
               <a:t>- Show root-cause concentration bar chart.</a:t>
             </a:r>
           </a:p>
+          <a:p/>
+          <a:p>
+            <a:r>
+              <a:t>If this surface stalls &gt;10s:</a:t>
+            </a:r>
+          </a:p>
+          <a:p>
+            <a:r>
+              <a:t>Named fallback: ra_demo_prerun.html (exported KPIs, no live compute). Recovery script: "Here's the same view captured from our pre-run — the numbers reconcile to what you just saw on the dashboard."</a:t>
+            </a:r>
+          </a:p>
         </p:txBody>
       </p:sp>
       <p:sp>
@@ -1599,6 +2070,17 @@
               <a:t>We have reduced a portfolio-level number to the next best recovery action. Now the architect's question becomes: is this evidence, or merely an assertion?</a:t>
             </a:r>
           </a:p>
+          <a:p/>
+          <a:p>
+            <a:r>
+              <a:t>If this surface stalls &gt;10s:</a:t>
+            </a:r>
+          </a:p>
+          <a:p>
+            <a:r>
+              <a:t>Named fallback: ra_demo_prerun.html (exported KPIs, no live compute). Recovery script: "Here's the same view captured from our pre-run — the numbers reconcile to what you just saw on the dashboard."</a:t>
+            </a:r>
+          </a:p>
         </p:txBody>
       </p:sp>
       <p:sp>
@@ -1691,6 +2173,17 @@
               <a:t>The gold register retains the check type, source reference, detection method, severity, and amount at risk. Unity Catalog provides the governed analytical boundary and lineage path back through the reconciliation layer.</a:t>
             </a:r>
           </a:p>
+          <a:p/>
+          <a:p>
+            <a:r>
+              <a:t>If this surface stalls &gt;10s:</a:t>
+            </a:r>
+          </a:p>
+          <a:p>
+            <a:r>
+              <a:t>Named fallback: ra_demo_fallback.pdf (evidence-drawer slide). Recovery script: narrate the detection-evidence table verbatim from the fallback slide — it carries the same check_type/reference/source_table fields as the live drawer.</a:t>
+            </a:r>
+          </a:p>
         </p:txBody>
       </p:sp>
       <p:sp>
@@ -1781,6 +2274,17 @@
           <a:p>
             <a:r>
               <a:t>Executive: this gives leadership accountability. Technical: Lakebase provides transactional updates and relational constraints for case state, while the analytical evidence remains governed in Unity Catalog.</a:t>
+            </a:r>
+          </a:p>
+          <a:p/>
+          <a:p>
+            <a:r>
+              <a:t>If this surface stalls &gt;10s:</a:t>
+            </a:r>
+          </a:p>
+          <a:p>
+            <a:r>
+              <a:t>Named fallback: ra_demo_full.mp4 (case-workflow segment). Recovery script: "I'll play the recorded case-assignment flow rather than risk a stall on stage."</a:t>
             </a:r>
           </a:p>
         </p:txBody>
@@ -4919,7 +5423,7 @@
         </p:nvSpPr>
         <p:spPr>
           <a:xfrm>
-            <a:off x="0" y="2880360"/>
+            <a:off x="0" y="2743200"/>
             <a:ext cx="12191695" cy="914400"/>
           </a:xfrm>
           <a:prstGeom prst="rect">
@@ -4945,7 +5449,7 @@
                 </a:solidFill>
                 <a:latin typeface="Consolas"/>
               </a:rPr>
-              <a:t>$250M–$312.5M</a:t>
+              <a:t>$248M–$310M</a:t>
             </a:r>
           </a:p>
         </p:txBody>
@@ -4958,8 +5462,8 @@
         </p:nvSpPr>
         <p:spPr>
           <a:xfrm>
-            <a:off x="4495647" y="3794760"/>
-            <a:ext cx="3200400" cy="256032"/>
+            <a:off x="3124047" y="3794760"/>
+            <a:ext cx="5943600" cy="502920"/>
           </a:xfrm>
           <a:prstGeom prst="roundRect">
             <a:avLst>
@@ -4989,7 +5493,7 @@
           </a:fontRef>
         </p:style>
         <p:txBody>
-          <a:bodyPr rtlCol="0" anchor="ctr" lIns="73152" rIns="73152" tIns="18288" bIns="18288"/>
+          <a:bodyPr rtlCol="0" anchor="ctr" wrap="square" lIns="73152" rIns="73152" tIns="54864" bIns="54864"/>
           <a:lstStyle/>
           <a:p>
             <a:pPr algn="ctr"/>
@@ -4999,7 +5503,7 @@
                   <a:srgbClr val="A97C0B"/>
                 </a:solidFill>
               </a:rPr>
-              <a:t>ILLUSTRATIVE — BENCHMARK ESTIMATE AT LUMEN SCALE, NOT MEASURED LUMEN LEAKAGE</a:t>
+              <a:t>ILLUSTRATIVE — $12.402B SOURCED FY2025 LUMEN REVENUE (10-K) X 2.0-2.5% INDUSTRY LEAKAGE ASSUMPTION</a:t>
             </a:r>
           </a:p>
         </p:txBody>
@@ -5012,7 +5516,7 @@
         </p:nvSpPr>
         <p:spPr>
           <a:xfrm>
-            <a:off x="914400" y="4434840"/>
+            <a:off x="914400" y="4572000"/>
             <a:ext cx="10332720" cy="548640"/>
           </a:xfrm>
           <a:prstGeom prst="rect">
@@ -5204,7 +5708,7 @@
         <p:spPr>
           <a:xfrm>
             <a:off x="685800" y="1554480"/>
-            <a:ext cx="10789920" cy="457200"/>
+            <a:ext cx="10789920" cy="365760"/>
           </a:xfrm>
           <a:prstGeom prst="rect">
             <a:avLst/>
@@ -5242,7 +5746,7 @@
         </p:nvSpPr>
         <p:spPr>
           <a:xfrm>
-            <a:off x="685800" y="2011680"/>
+            <a:off x="685800" y="1920240"/>
             <a:ext cx="2514600" cy="1417320"/>
           </a:xfrm>
           <a:prstGeom prst="roundRect">
@@ -5313,7 +5817,7 @@
         </p:nvSpPr>
         <p:spPr>
           <a:xfrm>
-            <a:off x="3337560" y="2011680"/>
+            <a:off x="3337560" y="1920240"/>
             <a:ext cx="2514600" cy="1417320"/>
           </a:xfrm>
           <a:prstGeom prst="roundRect">
@@ -5384,7 +5888,7 @@
         </p:nvSpPr>
         <p:spPr>
           <a:xfrm>
-            <a:off x="5989320" y="2011680"/>
+            <a:off x="5989320" y="1920240"/>
             <a:ext cx="2514600" cy="1417320"/>
           </a:xfrm>
           <a:prstGeom prst="roundRect">
@@ -5455,7 +5959,7 @@
         </p:nvSpPr>
         <p:spPr>
           <a:xfrm>
-            <a:off x="8641080" y="2011680"/>
+            <a:off x="8641080" y="1920240"/>
             <a:ext cx="2514600" cy="1417320"/>
           </a:xfrm>
           <a:prstGeom prst="roundRect">
@@ -5526,7 +6030,7 @@
         </p:nvSpPr>
         <p:spPr>
           <a:xfrm>
-            <a:off x="685800" y="3566160"/>
+            <a:off x="685800" y="3474720"/>
             <a:ext cx="2514600" cy="1417320"/>
           </a:xfrm>
           <a:prstGeom prst="roundRect">
@@ -5597,7 +6101,7 @@
         </p:nvSpPr>
         <p:spPr>
           <a:xfrm>
-            <a:off x="3337560" y="3566160"/>
+            <a:off x="3337560" y="3474720"/>
             <a:ext cx="2514600" cy="1417320"/>
           </a:xfrm>
           <a:prstGeom prst="roundRect">
@@ -5668,7 +6172,7 @@
         </p:nvSpPr>
         <p:spPr>
           <a:xfrm>
-            <a:off x="5989320" y="3566160"/>
+            <a:off x="5989320" y="3474720"/>
             <a:ext cx="2514600" cy="1417320"/>
           </a:xfrm>
           <a:prstGeom prst="roundRect">
@@ -5739,7 +6243,7 @@
         </p:nvSpPr>
         <p:spPr>
           <a:xfrm>
-            <a:off x="8641080" y="3566160"/>
+            <a:off x="8641080" y="3474720"/>
             <a:ext cx="2514600" cy="1417320"/>
           </a:xfrm>
           <a:prstGeom prst="roundRect">
@@ -5963,7 +6467,7 @@
         <p:spPr>
           <a:xfrm>
             <a:off x="685800" y="1554480"/>
-            <a:ext cx="10789920" cy="457200"/>
+            <a:ext cx="10789920" cy="365760"/>
           </a:xfrm>
           <a:prstGeom prst="rect">
             <a:avLst/>
@@ -6001,7 +6505,7 @@
         </p:nvSpPr>
         <p:spPr>
           <a:xfrm>
-            <a:off x="685800" y="2011680"/>
+            <a:off x="685800" y="1920240"/>
             <a:ext cx="3429000" cy="1554480"/>
           </a:xfrm>
           <a:prstGeom prst="roundRect">
@@ -6072,7 +6576,7 @@
         </p:nvSpPr>
         <p:spPr>
           <a:xfrm>
-            <a:off x="4251960" y="2011680"/>
+            <a:off x="4251960" y="1920240"/>
             <a:ext cx="3429000" cy="1554480"/>
           </a:xfrm>
           <a:prstGeom prst="roundRect">
@@ -6143,7 +6647,7 @@
         </p:nvSpPr>
         <p:spPr>
           <a:xfrm>
-            <a:off x="7818120" y="2011680"/>
+            <a:off x="7818120" y="1920240"/>
             <a:ext cx="3429000" cy="1554480"/>
           </a:xfrm>
           <a:prstGeom prst="roundRect">
@@ -6214,7 +6718,7 @@
         </p:nvSpPr>
         <p:spPr>
           <a:xfrm>
-            <a:off x="685800" y="3749040"/>
+            <a:off x="685800" y="3657600"/>
             <a:ext cx="10561320" cy="1463040"/>
           </a:xfrm>
           <a:prstGeom prst="roundRect">
@@ -6468,7 +6972,7 @@
         <p:spPr>
           <a:xfrm>
             <a:off x="685800" y="1554480"/>
-            <a:ext cx="10789920" cy="457200"/>
+            <a:ext cx="10789920" cy="365760"/>
           </a:xfrm>
           <a:prstGeom prst="rect">
             <a:avLst/>
@@ -6507,7 +7011,7 @@
           <p:nvPr/>
         </p:nvGraphicFramePr>
         <p:xfrm>
-          <a:off x="685800" y="2011680"/>
+          <a:off x="685800" y="1920240"/>
           <a:ext cx="10561320" cy="4023360"/>
         </p:xfrm>
         <a:graphic>
@@ -7014,7 +7518,7 @@
         <p:spPr>
           <a:xfrm>
             <a:off x="685800" y="1554480"/>
-            <a:ext cx="10789920" cy="457200"/>
+            <a:ext cx="10789920" cy="365760"/>
           </a:xfrm>
           <a:prstGeom prst="rect">
             <a:avLst/>
@@ -7052,7 +7556,7 @@
         </p:nvSpPr>
         <p:spPr>
           <a:xfrm>
-            <a:off x="685800" y="2011680"/>
+            <a:off x="685800" y="1920240"/>
             <a:ext cx="5212080" cy="4023360"/>
           </a:xfrm>
           <a:prstGeom prst="roundRect">
@@ -7198,7 +7702,7 @@
         </p:nvSpPr>
         <p:spPr>
           <a:xfrm>
-            <a:off x="6080760" y="2011680"/>
+            <a:off x="6080760" y="1920240"/>
             <a:ext cx="5394960" cy="1828800"/>
           </a:xfrm>
           <a:prstGeom prst="roundRect">
@@ -7284,7 +7788,7 @@
         </p:nvSpPr>
         <p:spPr>
           <a:xfrm>
-            <a:off x="6080760" y="4023360"/>
+            <a:off x="6080760" y="3931920"/>
             <a:ext cx="5394960" cy="2011680"/>
           </a:xfrm>
           <a:prstGeom prst="roundRect">
@@ -7945,12 +8449,12 @@
           <a:p>
             <a:pPr algn="ctr"/>
             <a:r>
-              <a:rPr b="1" sz="2200">
+              <a:rPr b="1" sz="2000">
                 <a:solidFill>
                   <a:srgbClr val="9C2B2B"/>
                 </a:solidFill>
               </a:rPr>
-              <a:t>$250M–$312M</a:t>
+              <a:t>$248M–$310M</a:t>
             </a:r>
           </a:p>
           <a:p>
@@ -7960,12 +8464,12 @@
               </a:spcBef>
             </a:pPr>
             <a:r>
-              <a:rPr sz="1000">
-                <a:solidFill>
-                  <a:srgbClr val="5C6663"/>
-                </a:solidFill>
-              </a:rPr>
-              <a:t>Illustrative annual gross leakage exposure at Lumen scale</a:t>
+              <a:rPr sz="900">
+                <a:solidFill>
+                  <a:srgbClr val="5C6663"/>
+                </a:solidFill>
+              </a:rPr>
+              <a:t>Illustrative gross exposure: $12.402B sourced FY2025 Lumen revenue (10-K) x 2.0-2.5% industry leakage assumption</a:t>
             </a:r>
           </a:p>
         </p:txBody>
@@ -8016,12 +8520,12 @@
           <a:p>
             <a:pPr algn="ctr"/>
             <a:r>
-              <a:rPr b="1" sz="2200">
+              <a:rPr b="1" sz="2000">
                 <a:solidFill>
                   <a:srgbClr val="0A6E6E"/>
                 </a:solidFill>
               </a:rPr>
-              <a:t>$125M–$220M</a:t>
+              <a:t>$124M–$217M</a:t>
             </a:r>
           </a:p>
           <a:p>
@@ -8031,12 +8535,12 @@
               </a:spcBef>
             </a:pPr>
             <a:r>
-              <a:rPr sz="1000">
-                <a:solidFill>
-                  <a:srgbClr val="5C6663"/>
-                </a:solidFill>
-              </a:rPr>
-              <a:t>Defensible planning range: recovered + prevented over 12–24 months</a:t>
+              <a:rPr sz="900">
+                <a:solidFill>
+                  <a:srgbClr val="5C6663"/>
+                </a:solidFill>
+              </a:rPr>
+              <a:t>Illustrative recovery: gross exposure x 50-70% industry recovery-rate assumption, over 12-24 months</a:t>
             </a:r>
           </a:p>
         </p:txBody>
@@ -8049,8 +8553,47 @@
         </p:nvSpPr>
         <p:spPr>
           <a:xfrm>
-            <a:off x="685800" y="4846320"/>
-            <a:ext cx="10561320" cy="548640"/>
+            <a:off x="685800" y="4800600"/>
+            <a:ext cx="10561320" cy="320040"/>
+          </a:xfrm>
+          <a:prstGeom prst="rect">
+            <a:avLst/>
+          </a:prstGeom>
+          <a:noFill/>
+        </p:spPr>
+        <p:txBody>
+          <a:bodyPr wrap="square">
+            <a:spAutoFit/>
+          </a:bodyPr>
+          <a:lstStyle/>
+          <a:p>
+            <a:pPr algn="l">
+              <a:lnSpc>
+                <a:spcPct val="115000"/>
+              </a:lnSpc>
+            </a:pPr>
+            <a:r>
+              <a:rPr sz="1000" b="0" i="0">
+                <a:solidFill>
+                  <a:srgbClr val="9AA19E"/>
+                </a:solidFill>
+                <a:latin typeface="Calibri"/>
+              </a:rPr>
+              <a:t>Formula and full citations: Appendix F. Contrast with the synthetic Lakelink demo output shown live (~48,108 exceptions / ~$601.5M) — never the same number.</a:t>
+            </a:r>
+          </a:p>
+        </p:txBody>
+      </p:sp>
+      <p:sp>
+        <p:nvSpPr>
+          <p:cNvPr id="13" name="TextBox 12"/>
+          <p:cNvSpPr txBox="1"/>
+          <p:nvPr/>
+        </p:nvSpPr>
+        <p:spPr>
+          <a:xfrm>
+            <a:off x="685800" y="5166360"/>
+            <a:ext cx="10561320" cy="457200"/>
           </a:xfrm>
           <a:prstGeom prst="rect">
             <a:avLst/>
@@ -9890,7 +10433,7 @@
         <p:spPr>
           <a:xfrm>
             <a:off x="685800" y="1554480"/>
-            <a:ext cx="10789920" cy="457200"/>
+            <a:ext cx="10789920" cy="365760"/>
           </a:xfrm>
           <a:prstGeom prst="rect">
             <a:avLst/>
@@ -9928,7 +10471,7 @@
         </p:nvSpPr>
         <p:spPr>
           <a:xfrm>
-            <a:off x="685800" y="2011680"/>
+            <a:off x="685800" y="1920240"/>
             <a:ext cx="5212080" cy="3108960"/>
           </a:xfrm>
           <a:prstGeom prst="roundRect">
@@ -10074,7 +10617,7 @@
         </p:nvSpPr>
         <p:spPr>
           <a:xfrm>
-            <a:off x="6080760" y="2011680"/>
+            <a:off x="6080760" y="1920240"/>
             <a:ext cx="5394960" cy="3108960"/>
           </a:xfrm>
           <a:prstGeom prst="roundRect">
@@ -10344,7 +10887,7 @@
                 </a:solidFill>
                 <a:latin typeface="Calibri"/>
               </a:rPr>
-              <a:t>24 minutes prepared + 6 minutes Q&amp;A</a:t>
+              <a:t>Full route: 26:30 prepared + 3:30 Q&amp;A</a:t>
             </a:r>
           </a:p>
         </p:txBody>
@@ -10371,7 +10914,7 @@
                 <a:gridCol w="4389120"/>
                 <a:gridCol w="1554480"/>
               </a:tblGrid>
-              <a:tr h="382385">
+              <a:tr h="350520">
                 <a:tc>
                   <a:txBody>
                     <a:bodyPr/>
@@ -10399,7 +10942,7 @@
                   <a:tcPr/>
                 </a:tc>
               </a:tr>
-              <a:tr h="382385">
+              <a:tr h="350520">
                 <a:tc>
                   <a:txBody>
                     <a:bodyPr/>
@@ -10407,7 +10950,7 @@
                     <a:p>
                       <a:r>
                         <a:rPr sz="1000"/>
-                        <a:t>Slides 1–4: setup and contract</a:t>
+                        <a:t>Slides 1-4: setup and contract</a:t>
                       </a:r>
                     </a:p>
                   </a:txBody>
@@ -10420,14 +10963,14 @@
                     <a:p>
                       <a:r>
                         <a:rPr sz="1000"/>
-                        <a:t>4:00</a:t>
+                        <a:t>5:15</a:t>
                       </a:r>
                     </a:p>
                   </a:txBody>
                   <a:tcPr/>
                 </a:tc>
               </a:tr>
-              <a:tr h="382385">
+              <a:tr h="350520">
                 <a:tc>
                   <a:txBody>
                     <a:bodyPr/>
@@ -10435,7 +10978,7 @@
                     <a:p>
                       <a:r>
                         <a:rPr sz="1000"/>
-                        <a:t>Executive dashboard</a:t>
+                        <a:t>Executive dashboard (Demo 1)</a:t>
                       </a:r>
                     </a:p>
                   </a:txBody>
@@ -10455,7 +10998,7 @@
                   <a:tcPr/>
                 </a:tc>
               </a:tr>
-              <a:tr h="382385">
+              <a:tr h="350520">
                 <a:tc>
                   <a:txBody>
                     <a:bodyPr/>
@@ -10463,7 +11006,7 @@
                     <a:p>
                       <a:r>
                         <a:rPr sz="1000"/>
-                        <a:t>App Overview and Queue</a:t>
+                        <a:t>App Overview and Queue (Demo 2+3)</a:t>
                       </a:r>
                     </a:p>
                   </a:txBody>
@@ -10483,7 +11026,7 @@
                   <a:tcPr/>
                 </a:tc>
               </a:tr>
-              <a:tr h="382385">
+              <a:tr h="350520">
                 <a:tc>
                   <a:txBody>
                     <a:bodyPr/>
@@ -10491,7 +11034,7 @@
                     <a:p>
                       <a:r>
                         <a:rPr sz="1000"/>
-                        <a:t>Evidence drawer</a:t>
+                        <a:t>Evidence drawer (Demo 4)</a:t>
                       </a:r>
                     </a:p>
                   </a:txBody>
@@ -10511,7 +11054,7 @@
                   <a:tcPr/>
                 </a:tc>
               </a:tr>
-              <a:tr h="382385">
+              <a:tr h="350520">
                 <a:tc>
                   <a:txBody>
                     <a:bodyPr/>
@@ -10519,7 +11062,7 @@
                     <a:p>
                       <a:r>
                         <a:rPr sz="1000"/>
-                        <a:t>Assignment and lifecycle</a:t>
+                        <a:t>Assignment and lifecycle (Demo 5)</a:t>
                       </a:r>
                     </a:p>
                   </a:txBody>
@@ -10539,7 +11082,7 @@
                   <a:tcPr/>
                 </a:tc>
               </a:tr>
-              <a:tr h="382385">
+              <a:tr h="350520">
                 <a:tc>
                   <a:txBody>
                     <a:bodyPr/>
@@ -10547,7 +11090,7 @@
                     <a:p>
                       <a:r>
                         <a:rPr sz="1000"/>
-                        <a:t>Architecture</a:t>
+                        <a:t>Architecture (Demo 6)</a:t>
                       </a:r>
                     </a:p>
                   </a:txBody>
@@ -10567,7 +11110,7 @@
                   <a:tcPr/>
                 </a:tc>
               </a:tr>
-              <a:tr h="382385">
+              <a:tr h="350520">
                 <a:tc>
                   <a:txBody>
                     <a:bodyPr/>
@@ -10575,7 +11118,7 @@
                     <a:p>
                       <a:r>
                         <a:rPr sz="1000"/>
-                        <a:t>AI surface</a:t>
+                        <a:t>AI surface (Demo 7)</a:t>
                       </a:r>
                     </a:p>
                   </a:txBody>
@@ -10595,7 +11138,7 @@
                   <a:tcPr/>
                 </a:tc>
               </a:tr>
-              <a:tr h="382385">
+              <a:tr h="350520">
                 <a:tc>
                   <a:txBody>
                     <a:bodyPr/>
@@ -10603,7 +11146,7 @@
                     <a:p>
                       <a:r>
                         <a:rPr sz="1000"/>
-                        <a:t>Trade-offs and value close</a:t>
+                        <a:t>Trade-offs and value close (Slides 5-7)</a:t>
                       </a:r>
                     </a:p>
                   </a:txBody>
@@ -10616,14 +11159,14 @@
                     <a:p>
                       <a:r>
                         <a:rPr sz="1000"/>
-                        <a:t>3:30</a:t>
+                        <a:t>4:45</a:t>
                       </a:r>
                     </a:p>
                   </a:txBody>
                   <a:tcPr/>
                 </a:tc>
               </a:tr>
-              <a:tr h="382385">
+              <a:tr h="350520">
                 <a:tc>
                   <a:txBody>
                     <a:bodyPr/>
@@ -10644,14 +11187,14 @@
                     <a:p>
                       <a:r>
                         <a:rPr sz="1000"/>
-                        <a:t>24:00</a:t>
+                        <a:t>26:30</a:t>
                       </a:r>
                     </a:p>
                   </a:txBody>
                   <a:tcPr/>
                 </a:tc>
               </a:tr>
-              <a:tr h="382390">
+              <a:tr h="350520">
                 <a:tc>
                   <a:txBody>
                     <a:bodyPr/>
@@ -10672,7 +11215,35 @@
                     <a:p>
                       <a:r>
                         <a:rPr sz="1000"/>
-                        <a:t>6:00</a:t>
+                        <a:t>3:30</a:t>
+                      </a:r>
+                    </a:p>
+                  </a:txBody>
+                  <a:tcPr/>
+                </a:tc>
+              </a:tr>
+              <a:tr h="350520">
+                <a:tc>
+                  <a:txBody>
+                    <a:bodyPr/>
+                    <a:lstStyle/>
+                    <a:p>
+                      <a:r>
+                        <a:rPr sz="1000"/>
+                        <a:t>Grand total</a:t>
+                      </a:r>
+                    </a:p>
+                  </a:txBody>
+                  <a:tcPr/>
+                </a:tc>
+                <a:tc>
+                  <a:txBody>
+                    <a:bodyPr/>
+                    <a:lstStyle/>
+                    <a:p>
+                      <a:r>
+                        <a:rPr sz="1000"/>
+                        <a:t>30:00</a:t>
                       </a:r>
                     </a:p>
                   </a:txBody>
@@ -10734,7 +11305,7 @@
                   <a:srgbClr val="1C2321"/>
                 </a:solidFill>
               </a:rPr>
-              <a:t>20-minute compression</a:t>
+              <a:t>Rehearsed 20-22 min compressed route</a:t>
             </a:r>
           </a:p>
           <a:p>
@@ -10744,12 +11315,12 @@
               </a:spcBef>
             </a:pPr>
             <a:r>
-              <a:rPr sz="1100">
-                <a:solidFill>
-                  <a:srgbClr val="5C6663"/>
-                </a:solidFill>
-              </a:rPr>
-              <a:t>Executive dashboard: 2:00</a:t>
+              <a:rPr sz="1000">
+                <a:solidFill>
+                  <a:srgbClr val="5C6663"/>
+                </a:solidFill>
+              </a:rPr>
+              <a:t>21:00 prepared + up to 9:00 Q&amp;A</a:t>
             </a:r>
           </a:p>
           <a:p>
@@ -10759,12 +11330,12 @@
               </a:spcBef>
             </a:pPr>
             <a:r>
-              <a:rPr sz="1100">
-                <a:solidFill>
-                  <a:srgbClr val="5C6663"/>
-                </a:solidFill>
-              </a:rPr>
-              <a:t>Overview and Queue: 2:30</a:t>
+              <a:rPr sz="1000">
+                <a:solidFill>
+                  <a:srgbClr val="5C6663"/>
+                </a:solidFill>
+              </a:rPr>
+              <a:t> </a:t>
             </a:r>
           </a:p>
           <a:p>
@@ -10774,12 +11345,12 @@
               </a:spcBef>
             </a:pPr>
             <a:r>
-              <a:rPr sz="1100">
-                <a:solidFill>
-                  <a:srgbClr val="5C6663"/>
-                </a:solidFill>
-              </a:rPr>
-              <a:t>Evidence drawer: 2:00</a:t>
+              <a:rPr sz="1000">
+                <a:solidFill>
+                  <a:srgbClr val="5C6663"/>
+                </a:solidFill>
+              </a:rPr>
+              <a:t>Setup: 3:00 | Exec dashboard: 2:00</a:t>
             </a:r>
           </a:p>
           <a:p>
@@ -10789,12 +11360,12 @@
               </a:spcBef>
             </a:pPr>
             <a:r>
-              <a:rPr sz="1100">
-                <a:solidFill>
-                  <a:srgbClr val="5C6663"/>
-                </a:solidFill>
-              </a:rPr>
-              <a:t>Case lifecycle: 2:00</a:t>
+              <a:rPr sz="1000">
+                <a:solidFill>
+                  <a:srgbClr val="5C6663"/>
+                </a:solidFill>
+              </a:rPr>
+              <a:t>Overview+Queue: 2:30 | Evidence: 2:00</a:t>
             </a:r>
           </a:p>
           <a:p>
@@ -10804,12 +11375,12 @@
               </a:spcBef>
             </a:pPr>
             <a:r>
-              <a:rPr sz="1100">
-                <a:solidFill>
-                  <a:srgbClr val="5C6663"/>
-                </a:solidFill>
-              </a:rPr>
-              <a:t>Architecture: 2:00</a:t>
+              <a:rPr sz="1000">
+                <a:solidFill>
+                  <a:srgbClr val="5C6663"/>
+                </a:solidFill>
+              </a:rPr>
+              <a:t>Case lifecycle: 2:00 | Architecture: 2:30</a:t>
             </a:r>
           </a:p>
           <a:p>
@@ -10819,12 +11390,12 @@
               </a:spcBef>
             </a:pPr>
             <a:r>
-              <a:rPr sz="1100">
-                <a:solidFill>
-                  <a:srgbClr val="5C6663"/>
-                </a:solidFill>
-              </a:rPr>
-              <a:t>AI: 1:00</a:t>
+              <a:rPr sz="1000">
+                <a:solidFill>
+                  <a:srgbClr val="5C6663"/>
+                </a:solidFill>
+              </a:rPr>
+              <a:t>AI (one surface): 1:30 | Trade-offs+close: 5:30</a:t>
             </a:r>
           </a:p>
           <a:p>
@@ -10834,12 +11405,12 @@
               </a:spcBef>
             </a:pPr>
             <a:r>
-              <a:rPr sz="1100">
-                <a:solidFill>
-                  <a:srgbClr val="5C6663"/>
-                </a:solidFill>
-              </a:rPr>
-              <a:t>Close: 2:00</a:t>
+              <a:rPr sz="1000">
+                <a:solidFill>
+                  <a:srgbClr val="5C6663"/>
+                </a:solidFill>
+              </a:rPr>
+              <a:t> </a:t>
             </a:r>
           </a:p>
           <a:p>
@@ -10849,27 +11420,12 @@
               </a:spcBef>
             </a:pPr>
             <a:r>
-              <a:rPr sz="1100">
-                <a:solidFill>
-                  <a:srgbClr val="5C6663"/>
-                </a:solidFill>
-              </a:rPr>
-              <a:t> </a:t>
-            </a:r>
-          </a:p>
-          <a:p>
-            <a:pPr>
-              <a:spcBef>
-                <a:spcPts val="300"/>
-              </a:spcBef>
-            </a:pPr>
-            <a:r>
-              <a:rPr sz="1100">
-                <a:solidFill>
-                  <a:srgbClr val="5C6663"/>
-                </a:solidFill>
-              </a:rPr>
-              <a:t>Do not cut quantification, evidence, or recovery.</a:t>
+              <a:rPr sz="1000">
+                <a:solidFill>
+                  <a:srgbClr val="5C6663"/>
+                </a:solidFill>
+              </a:rPr>
+              <a:t>Cuts land on setup and architecture narration — never on quantify, prove, recover, or the sponsorship close.</a:t>
             </a:r>
           </a:p>
         </p:txBody>
@@ -11035,7 +11591,7 @@
         <p:spPr>
           <a:xfrm>
             <a:off x="685800" y="1554480"/>
-            <a:ext cx="10789920" cy="457200"/>
+            <a:ext cx="10789920" cy="365760"/>
           </a:xfrm>
           <a:prstGeom prst="rect">
             <a:avLst/>
@@ -11073,7 +11629,7 @@
         </p:nvSpPr>
         <p:spPr>
           <a:xfrm>
-            <a:off x="685800" y="2011680"/>
+            <a:off x="685800" y="1920240"/>
             <a:ext cx="5212080" cy="4206240"/>
           </a:xfrm>
           <a:prstGeom prst="roundRect">
@@ -11219,7 +11775,7 @@
         </p:nvSpPr>
         <p:spPr>
           <a:xfrm>
-            <a:off x="6080760" y="2011680"/>
+            <a:off x="6080760" y="1920240"/>
             <a:ext cx="5394960" cy="1828800"/>
           </a:xfrm>
           <a:prstGeom prst="roundRect">
@@ -11290,7 +11846,7 @@
         </p:nvSpPr>
         <p:spPr>
           <a:xfrm>
-            <a:off x="6080760" y="4023360"/>
+            <a:off x="6080760" y="3931920"/>
             <a:ext cx="5394960" cy="1828800"/>
           </a:xfrm>
           <a:prstGeom prst="roundRect">
@@ -11361,7 +11917,7 @@
         </p:nvSpPr>
         <p:spPr>
           <a:xfrm>
-            <a:off x="6080760" y="5989319"/>
+            <a:off x="6080760" y="5897879"/>
             <a:ext cx="5394960" cy="274320"/>
           </a:xfrm>
           <a:prstGeom prst="rect">
@@ -12027,6 +12583,642 @@
 </p:sld>
 </file>
 
+<file path=ppt/slides/slide21.xml><?xml version="1.0" encoding="utf-8"?>
+<p:sld xmlns:a="http://schemas.openxmlformats.org/drawingml/2006/main" xmlns:p="http://schemas.openxmlformats.org/presentationml/2006/main" xmlns:r="http://schemas.openxmlformats.org/officeDocument/2006/relationships">
+  <p:cSld>
+    <p:bg>
+      <p:bgPr>
+        <a:solidFill>
+          <a:srgbClr val="F5F6F5"/>
+        </a:solidFill>
+        <a:effectLst/>
+      </p:bgPr>
+    </p:bg>
+    <p:spTree>
+      <p:nvGrpSpPr>
+        <p:cNvPr id="1" name=""/>
+        <p:cNvGrpSpPr/>
+        <p:nvPr/>
+      </p:nvGrpSpPr>
+      <p:grpSpPr/>
+      <p:sp>
+        <p:nvSpPr>
+          <p:cNvPr id="2" name="Rounded Rectangle 1"/>
+          <p:cNvSpPr/>
+          <p:nvPr/>
+        </p:nvSpPr>
+        <p:spPr>
+          <a:xfrm>
+            <a:off x="457200" y="365760"/>
+            <a:ext cx="11277295" cy="6126480"/>
+          </a:xfrm>
+          <a:prstGeom prst="roundRect">
+            <a:avLst>
+              <a:gd name="adj" fmla="val 3000"/>
+            </a:avLst>
+          </a:prstGeom>
+          <a:solidFill>
+            <a:srgbClr val="FFFFFF"/>
+          </a:solidFill>
+          <a:ln w="12700">
+            <a:solidFill>
+              <a:srgbClr val="DFE1DF"/>
+            </a:solidFill>
+          </a:ln>
+          <a:effectLst/>
+        </p:spPr>
+        <p:style>
+          <a:lnRef idx="1">
+            <a:schemeClr val="accent1"/>
+          </a:lnRef>
+          <a:fillRef idx="3">
+            <a:schemeClr val="accent1"/>
+          </a:fillRef>
+          <a:effectRef idx="2">
+            <a:schemeClr val="accent1"/>
+          </a:effectRef>
+          <a:fontRef idx="minor">
+            <a:schemeClr val="lt1"/>
+          </a:fontRef>
+        </p:style>
+        <p:txBody>
+          <a:bodyPr rtlCol="0" anchor="ctr"/>
+          <a:lstStyle/>
+          <a:p>
+            <a:pPr algn="ctr"/>
+          </a:p>
+        </p:txBody>
+      </p:sp>
+      <p:sp>
+        <p:nvSpPr>
+          <p:cNvPr id="3" name="TextBox 2"/>
+          <p:cNvSpPr txBox="1"/>
+          <p:nvPr/>
+        </p:nvSpPr>
+        <p:spPr>
+          <a:xfrm>
+            <a:off x="685800" y="594360"/>
+            <a:ext cx="10789920" cy="320040"/>
+          </a:xfrm>
+          <a:prstGeom prst="rect">
+            <a:avLst/>
+          </a:prstGeom>
+          <a:noFill/>
+        </p:spPr>
+        <p:txBody>
+          <a:bodyPr wrap="square">
+            <a:spAutoFit/>
+          </a:bodyPr>
+          <a:lstStyle/>
+          <a:p>
+            <a:pPr algn="l">
+              <a:lnSpc>
+                <a:spcPct val="115000"/>
+              </a:lnSpc>
+            </a:pPr>
+            <a:r>
+              <a:rPr sz="1200" b="1" i="0">
+                <a:solidFill>
+                  <a:srgbClr val="0A6E6E"/>
+                </a:solidFill>
+                <a:latin typeface="Calibri"/>
+              </a:rPr>
+              <a:t>APPENDIX F · SOURCES &amp; ASSUMPTIONS</a:t>
+            </a:r>
+          </a:p>
+        </p:txBody>
+      </p:sp>
+      <p:sp>
+        <p:nvSpPr>
+          <p:cNvPr id="4" name="TextBox 3"/>
+          <p:cNvSpPr txBox="1"/>
+          <p:nvPr/>
+        </p:nvSpPr>
+        <p:spPr>
+          <a:xfrm>
+            <a:off x="685800" y="960120"/>
+            <a:ext cx="10789920" cy="640080"/>
+          </a:xfrm>
+          <a:prstGeom prst="rect">
+            <a:avLst/>
+          </a:prstGeom>
+          <a:noFill/>
+        </p:spPr>
+        <p:txBody>
+          <a:bodyPr wrap="square">
+            <a:spAutoFit/>
+          </a:bodyPr>
+          <a:lstStyle/>
+          <a:p>
+            <a:pPr algn="l">
+              <a:lnSpc>
+                <a:spcPct val="115000"/>
+              </a:lnSpc>
+            </a:pPr>
+            <a:r>
+              <a:rPr sz="2600" b="1" i="0">
+                <a:solidFill>
+                  <a:srgbClr val="1C2321"/>
+                </a:solidFill>
+                <a:latin typeface="Calibri"/>
+              </a:rPr>
+              <a:t>Where the $248M-$310M and $124M-$217M come from</a:t>
+            </a:r>
+          </a:p>
+        </p:txBody>
+      </p:sp>
+      <p:sp>
+        <p:nvSpPr>
+          <p:cNvPr id="5" name="TextBox 4"/>
+          <p:cNvSpPr txBox="1"/>
+          <p:nvPr/>
+        </p:nvSpPr>
+        <p:spPr>
+          <a:xfrm>
+            <a:off x="685800" y="1554480"/>
+            <a:ext cx="10789920" cy="640080"/>
+          </a:xfrm>
+          <a:prstGeom prst="rect">
+            <a:avLst/>
+          </a:prstGeom>
+          <a:noFill/>
+        </p:spPr>
+        <p:txBody>
+          <a:bodyPr wrap="square">
+            <a:spAutoFit/>
+          </a:bodyPr>
+          <a:lstStyle/>
+          <a:p>
+            <a:pPr algn="l">
+              <a:lnSpc>
+                <a:spcPct val="115000"/>
+              </a:lnSpc>
+            </a:pPr>
+            <a:r>
+              <a:rPr sz="1400" b="0" i="0">
+                <a:solidFill>
+                  <a:srgbClr val="5C6663"/>
+                </a:solidFill>
+                <a:latin typeface="Calibri"/>
+              </a:rPr>
+              <a:t>Three categories used consistently across this deck: sourced Lumen fact, external industry assumption, synthetic Lakelink demo output.</a:t>
+            </a:r>
+          </a:p>
+        </p:txBody>
+      </p:sp>
+      <p:sp>
+        <p:nvSpPr>
+          <p:cNvPr id="6" name="Rounded Rectangle 5"/>
+          <p:cNvSpPr/>
+          <p:nvPr/>
+        </p:nvSpPr>
+        <p:spPr>
+          <a:xfrm>
+            <a:off x="685800" y="2194560"/>
+            <a:ext cx="5212080" cy="1600200"/>
+          </a:xfrm>
+          <a:prstGeom prst="roundRect">
+            <a:avLst>
+              <a:gd name="adj" fmla="val 6000"/>
+            </a:avLst>
+          </a:prstGeom>
+          <a:solidFill>
+            <a:srgbClr val="FBFBFA"/>
+          </a:solidFill>
+          <a:ln w="9525">
+            <a:solidFill>
+              <a:srgbClr val="DFE1DF"/>
+            </a:solidFill>
+          </a:ln>
+          <a:effectLst/>
+        </p:spPr>
+        <p:style>
+          <a:lnRef idx="1">
+            <a:schemeClr val="accent1"/>
+          </a:lnRef>
+          <a:fillRef idx="3">
+            <a:schemeClr val="accent1"/>
+          </a:fillRef>
+          <a:effectRef idx="2">
+            <a:schemeClr val="accent1"/>
+          </a:effectRef>
+          <a:fontRef idx="minor">
+            <a:schemeClr val="lt1"/>
+          </a:fontRef>
+        </p:style>
+        <p:txBody>
+          <a:bodyPr rtlCol="0" anchor="t" wrap="square" lIns="137160" rIns="137160" tIns="91440" bIns="91440"/>
+          <a:lstStyle/>
+          <a:p>
+            <a:pPr algn="ctr"/>
+            <a:r>
+              <a:rPr b="1" sz="1100">
+                <a:solidFill>
+                  <a:srgbClr val="1C2321"/>
+                </a:solidFill>
+              </a:rPr>
+              <a:t>Sourced Lumen fact</a:t>
+            </a:r>
+          </a:p>
+          <a:p>
+            <a:pPr>
+              <a:spcBef>
+                <a:spcPts val="300"/>
+              </a:spcBef>
+            </a:pPr>
+            <a:r>
+              <a:rPr sz="900">
+                <a:solidFill>
+                  <a:srgbClr val="5C6663"/>
+                </a:solidFill>
+              </a:rPr>
+              <a:t>$12.402B total revenue, FY2025.</a:t>
+            </a:r>
+          </a:p>
+          <a:p>
+            <a:pPr>
+              <a:spcBef>
+                <a:spcPts val="300"/>
+              </a:spcBef>
+            </a:pPr>
+            <a:r>
+              <a:rPr sz="900">
+                <a:solidFill>
+                  <a:srgbClr val="5C6663"/>
+                </a:solidFill>
+              </a:rPr>
+              <a:t>Lumen Technologies Form 10-K, filed with the SEC Feb 20, 2026 (accession 0000018926-26-000014). Corroborated by Lumen's Feb 3, 2026 Q4/FY2025 earnings release (Exhibit 99.1 to Form 8-K) — same figure, down 5% from $13.108B in FY2024.</a:t>
+            </a:r>
+          </a:p>
+        </p:txBody>
+      </p:sp>
+      <p:sp>
+        <p:nvSpPr>
+          <p:cNvPr id="7" name="Rounded Rectangle 6"/>
+          <p:cNvSpPr/>
+          <p:nvPr/>
+        </p:nvSpPr>
+        <p:spPr>
+          <a:xfrm>
+            <a:off x="6080760" y="2194560"/>
+            <a:ext cx="5212080" cy="1600200"/>
+          </a:xfrm>
+          <a:prstGeom prst="roundRect">
+            <a:avLst>
+              <a:gd name="adj" fmla="val 6000"/>
+            </a:avLst>
+          </a:prstGeom>
+          <a:solidFill>
+            <a:srgbClr val="FBFBFA"/>
+          </a:solidFill>
+          <a:ln w="9525">
+            <a:solidFill>
+              <a:srgbClr val="DFE1DF"/>
+            </a:solidFill>
+          </a:ln>
+          <a:effectLst/>
+        </p:spPr>
+        <p:style>
+          <a:lnRef idx="1">
+            <a:schemeClr val="accent1"/>
+          </a:lnRef>
+          <a:fillRef idx="3">
+            <a:schemeClr val="accent1"/>
+          </a:fillRef>
+          <a:effectRef idx="2">
+            <a:schemeClr val="accent1"/>
+          </a:effectRef>
+          <a:fontRef idx="minor">
+            <a:schemeClr val="lt1"/>
+          </a:fontRef>
+        </p:style>
+        <p:txBody>
+          <a:bodyPr rtlCol="0" anchor="t" wrap="square" lIns="137160" rIns="137160" tIns="91440" bIns="91440"/>
+          <a:lstStyle/>
+          <a:p>
+            <a:pPr algn="ctr"/>
+            <a:r>
+              <a:rPr b="1" sz="1100">
+                <a:solidFill>
+                  <a:srgbClr val="1C2321"/>
+                </a:solidFill>
+              </a:rPr>
+              <a:t>External assumption — leakage rate</a:t>
+            </a:r>
+          </a:p>
+          <a:p>
+            <a:pPr>
+              <a:spcBef>
+                <a:spcPts val="300"/>
+              </a:spcBef>
+            </a:pPr>
+            <a:r>
+              <a:rPr sz="900">
+                <a:solidFill>
+                  <a:srgbClr val="5C6663"/>
+                </a:solidFill>
+              </a:rPr>
+              <a:t>2.0%-2.5% of revenue as gross leakage.</a:t>
+            </a:r>
+          </a:p>
+          <a:p>
+            <a:pPr>
+              <a:spcBef>
+                <a:spcPts val="300"/>
+              </a:spcBef>
+            </a:pPr>
+            <a:r>
+              <a:rPr sz="900">
+                <a:solidFill>
+                  <a:srgbClr val="5C6663"/>
+                </a:solidFill>
+              </a:rPr>
+              <a:t>Bounded by PwC's "1-5% of telecom revenue" range (Dec 2020) and TM Forum's 2017/18 survey (0.9% measured / 1.9% estimated). Caveat: TM Forum's 2024-2025 survey (IG1438) shows industry average has fallen to ~0.52%; a separate RAG 2020 survey found non-fraud billing-error leakage alone averages 2.92%. Our range is a conservative planning test between those two figures.</a:t>
+            </a:r>
+          </a:p>
+        </p:txBody>
+      </p:sp>
+      <p:sp>
+        <p:nvSpPr>
+          <p:cNvPr id="8" name="Rounded Rectangle 7"/>
+          <p:cNvSpPr/>
+          <p:nvPr/>
+        </p:nvSpPr>
+        <p:spPr>
+          <a:xfrm>
+            <a:off x="685800" y="3931920"/>
+            <a:ext cx="5212080" cy="1600200"/>
+          </a:xfrm>
+          <a:prstGeom prst="roundRect">
+            <a:avLst>
+              <a:gd name="adj" fmla="val 6000"/>
+            </a:avLst>
+          </a:prstGeom>
+          <a:solidFill>
+            <a:srgbClr val="FBFBFA"/>
+          </a:solidFill>
+          <a:ln w="9525">
+            <a:solidFill>
+              <a:srgbClr val="DFE1DF"/>
+            </a:solidFill>
+          </a:ln>
+          <a:effectLst/>
+        </p:spPr>
+        <p:style>
+          <a:lnRef idx="1">
+            <a:schemeClr val="accent1"/>
+          </a:lnRef>
+          <a:fillRef idx="3">
+            <a:schemeClr val="accent1"/>
+          </a:fillRef>
+          <a:effectRef idx="2">
+            <a:schemeClr val="accent1"/>
+          </a:effectRef>
+          <a:fontRef idx="minor">
+            <a:schemeClr val="lt1"/>
+          </a:fontRef>
+        </p:style>
+        <p:txBody>
+          <a:bodyPr rtlCol="0" anchor="t" wrap="square" lIns="137160" rIns="137160" tIns="91440" bIns="91440"/>
+          <a:lstStyle/>
+          <a:p>
+            <a:pPr algn="ctr"/>
+            <a:r>
+              <a:rPr b="1" sz="1100">
+                <a:solidFill>
+                  <a:srgbClr val="1C2321"/>
+                </a:solidFill>
+              </a:rPr>
+              <a:t>External assumption — recovery rate</a:t>
+            </a:r>
+          </a:p>
+          <a:p>
+            <a:pPr>
+              <a:spcBef>
+                <a:spcPts val="300"/>
+              </a:spcBef>
+            </a:pPr>
+            <a:r>
+              <a:rPr sz="900">
+                <a:solidFill>
+                  <a:srgbClr val="5C6663"/>
+                </a:solidFill>
+              </a:rPr>
+              <a:t>50%-70% of identified leakage recovered/prevented.</a:t>
+            </a:r>
+          </a:p>
+          <a:p>
+            <a:pPr>
+              <a:spcBef>
+                <a:spcPts val="300"/>
+              </a:spcBef>
+            </a:pPr>
+            <a:r>
+              <a:rPr sz="900">
+                <a:solidFill>
+                  <a:srgbClr val="5C6663"/>
+                </a:solidFill>
+              </a:rPr>
+              <a:t>TM Forum 2017/18 survey: 51% average industry recovery rate; top-tier programs report 75%+.</a:t>
+            </a:r>
+          </a:p>
+        </p:txBody>
+      </p:sp>
+      <p:sp>
+        <p:nvSpPr>
+          <p:cNvPr id="9" name="Rounded Rectangle 8"/>
+          <p:cNvSpPr/>
+          <p:nvPr/>
+        </p:nvSpPr>
+        <p:spPr>
+          <a:xfrm>
+            <a:off x="6080760" y="3931920"/>
+            <a:ext cx="5212080" cy="1600200"/>
+          </a:xfrm>
+          <a:prstGeom prst="roundRect">
+            <a:avLst>
+              <a:gd name="adj" fmla="val 6000"/>
+            </a:avLst>
+          </a:prstGeom>
+          <a:solidFill>
+            <a:srgbClr val="FBFBFA"/>
+          </a:solidFill>
+          <a:ln w="9525">
+            <a:solidFill>
+              <a:srgbClr val="DFE1DF"/>
+            </a:solidFill>
+          </a:ln>
+          <a:effectLst/>
+        </p:spPr>
+        <p:style>
+          <a:lnRef idx="1">
+            <a:schemeClr val="accent1"/>
+          </a:lnRef>
+          <a:fillRef idx="3">
+            <a:schemeClr val="accent1"/>
+          </a:fillRef>
+          <a:effectRef idx="2">
+            <a:schemeClr val="accent1"/>
+          </a:effectRef>
+          <a:fontRef idx="minor">
+            <a:schemeClr val="lt1"/>
+          </a:fontRef>
+        </p:style>
+        <p:txBody>
+          <a:bodyPr rtlCol="0" anchor="t" wrap="square" lIns="137160" rIns="137160" tIns="91440" bIns="91440"/>
+          <a:lstStyle/>
+          <a:p>
+            <a:pPr algn="ctr"/>
+            <a:r>
+              <a:rPr b="1" sz="1100">
+                <a:solidFill>
+                  <a:srgbClr val="1C2321"/>
+                </a:solidFill>
+              </a:rPr>
+              <a:t>Synthetic Lakelink demo output (never blended with the above)</a:t>
+            </a:r>
+          </a:p>
+          <a:p>
+            <a:pPr>
+              <a:spcBef>
+                <a:spcPts val="300"/>
+              </a:spcBef>
+            </a:pPr>
+            <a:r>
+              <a:rPr sz="900">
+                <a:solidFill>
+                  <a:srgbClr val="5C6663"/>
+                </a:solidFill>
+              </a:rPr>
+              <a:t>~48,108 exceptions / ~$601.5M at risk.</a:t>
+            </a:r>
+          </a:p>
+          <a:p>
+            <a:pPr>
+              <a:spcBef>
+                <a:spcPts val="300"/>
+              </a:spcBef>
+            </a:pPr>
+            <a:r>
+              <a:rPr sz="900">
+                <a:solidFill>
+                  <a:srgbClr val="5C6663"/>
+                </a:solidFill>
+              </a:rPr>
+              <a:t>Output of the seeded gold_leakage_summary register (fixed seed=42) shown live in Demos 1-2 — entirely separate data, entirely separate number, from a different (fictional) operator.</a:t>
+            </a:r>
+          </a:p>
+        </p:txBody>
+      </p:sp>
+      <p:sp>
+        <p:nvSpPr>
+          <p:cNvPr id="10" name="Rounded Rectangle 9"/>
+          <p:cNvSpPr/>
+          <p:nvPr/>
+        </p:nvSpPr>
+        <p:spPr>
+          <a:xfrm>
+            <a:off x="685800" y="5669280"/>
+            <a:ext cx="10561320" cy="1371600"/>
+          </a:xfrm>
+          <a:prstGeom prst="roundRect">
+            <a:avLst>
+              <a:gd name="adj" fmla="val 6000"/>
+            </a:avLst>
+          </a:prstGeom>
+          <a:solidFill>
+            <a:srgbClr val="FBFBFA"/>
+          </a:solidFill>
+          <a:ln w="9525">
+            <a:solidFill>
+              <a:srgbClr val="DFE1DF"/>
+            </a:solidFill>
+          </a:ln>
+          <a:effectLst/>
+        </p:spPr>
+        <p:style>
+          <a:lnRef idx="1">
+            <a:schemeClr val="accent1"/>
+          </a:lnRef>
+          <a:fillRef idx="3">
+            <a:schemeClr val="accent1"/>
+          </a:fillRef>
+          <a:effectRef idx="2">
+            <a:schemeClr val="accent1"/>
+          </a:effectRef>
+          <a:fontRef idx="minor">
+            <a:schemeClr val="lt1"/>
+          </a:fontRef>
+        </p:style>
+        <p:txBody>
+          <a:bodyPr rtlCol="0" anchor="t" wrap="square" lIns="137160" rIns="137160" tIns="91440" bIns="91440"/>
+          <a:lstStyle/>
+          <a:p>
+            <a:pPr algn="ctr"/>
+            <a:r>
+              <a:rPr b="1" sz="1300">
+                <a:solidFill>
+                  <a:srgbClr val="1C2321"/>
+                </a:solidFill>
+              </a:rPr>
+              <a:t>The formula, in full</a:t>
+            </a:r>
+          </a:p>
+          <a:p>
+            <a:pPr>
+              <a:spcBef>
+                <a:spcPts val="300"/>
+              </a:spcBef>
+            </a:pPr>
+            <a:r>
+              <a:rPr sz="1100">
+                <a:solidFill>
+                  <a:srgbClr val="5C6663"/>
+                </a:solidFill>
+              </a:rPr>
+              <a:t>Gross exposure = $12.402B x 2.0% to $12.402B x 2.5% = $248.0M to $310.1M</a:t>
+            </a:r>
+          </a:p>
+          <a:p>
+            <a:pPr>
+              <a:spcBef>
+                <a:spcPts val="300"/>
+              </a:spcBef>
+            </a:pPr>
+            <a:r>
+              <a:rPr sz="1100">
+                <a:solidFill>
+                  <a:srgbClr val="5C6663"/>
+                </a:solidFill>
+              </a:rPr>
+              <a:t> </a:t>
+            </a:r>
+          </a:p>
+          <a:p>
+            <a:pPr>
+              <a:spcBef>
+                <a:spcPts val="300"/>
+              </a:spcBef>
+            </a:pPr>
+            <a:r>
+              <a:rPr sz="1100">
+                <a:solidFill>
+                  <a:srgbClr val="5C6663"/>
+                </a:solidFill>
+              </a:rPr>
+              <a:t>Recovered/prevented = $248.0M x 50% to $310.1M x 70% = $124.0M to $217.0M</a:t>
+            </a:r>
+          </a:p>
+        </p:txBody>
+      </p:sp>
+    </p:spTree>
+  </p:cSld>
+  <p:clrMapOvr>
+    <a:masterClrMapping/>
+  </p:clrMapOvr>
+</p:sld>
+</file>
+
 <file path=ppt/slides/slide3.xml><?xml version="1.0" encoding="utf-8"?>
 <p:sld xmlns:a="http://schemas.openxmlformats.org/drawingml/2006/main" xmlns:p="http://schemas.openxmlformats.org/presentationml/2006/main" xmlns:r="http://schemas.openxmlformats.org/officeDocument/2006/relationships">
   <p:cSld>
@@ -12180,7 +13372,7 @@
         <p:spPr>
           <a:xfrm>
             <a:off x="685800" y="1554480"/>
-            <a:ext cx="10789920" cy="457200"/>
+            <a:ext cx="10789920" cy="365760"/>
           </a:xfrm>
           <a:prstGeom prst="rect">
             <a:avLst/>
@@ -12218,7 +13410,7 @@
         </p:nvSpPr>
         <p:spPr>
           <a:xfrm>
-            <a:off x="822960" y="2011680"/>
+            <a:off x="822960" y="1920240"/>
             <a:ext cx="10058400" cy="868680"/>
           </a:xfrm>
           <a:prstGeom prst="roundRect">
@@ -12289,7 +13481,7 @@
         </p:nvSpPr>
         <p:spPr>
           <a:xfrm>
-            <a:off x="822960" y="2999232"/>
+            <a:off x="822960" y="2907792"/>
             <a:ext cx="10058400" cy="868680"/>
           </a:xfrm>
           <a:prstGeom prst="roundRect">
@@ -12360,7 +13552,7 @@
         </p:nvSpPr>
         <p:spPr>
           <a:xfrm>
-            <a:off x="822960" y="3986784"/>
+            <a:off x="822960" y="3895344"/>
             <a:ext cx="10058400" cy="868680"/>
           </a:xfrm>
           <a:prstGeom prst="roundRect">
@@ -12431,7 +13623,7 @@
         </p:nvSpPr>
         <p:spPr>
           <a:xfrm>
-            <a:off x="822960" y="4974336"/>
+            <a:off x="822960" y="4882896"/>
             <a:ext cx="10058400" cy="868680"/>
           </a:xfrm>
           <a:prstGeom prst="roundRect">
@@ -12641,7 +13833,7 @@
                 </a:solidFill>
                 <a:latin typeface="Calibri"/>
               </a:rPr>
-              <a:t>In the next 16 minutes, three outcomes</a:t>
+              <a:t>In the next 16.5 minutes, three outcomes</a:t>
             </a:r>
           </a:p>
         </p:txBody>
@@ -12655,7 +13847,7 @@
         <p:spPr>
           <a:xfrm>
             <a:off x="685800" y="1554480"/>
-            <a:ext cx="10789920" cy="457200"/>
+            <a:ext cx="10789920" cy="365760"/>
           </a:xfrm>
           <a:prstGeom prst="rect">
             <a:avLst/>
@@ -12693,7 +13885,7 @@
         </p:nvSpPr>
         <p:spPr>
           <a:xfrm>
-            <a:off x="685800" y="2011680"/>
+            <a:off x="685800" y="1920240"/>
             <a:ext cx="3429000" cy="1371600"/>
           </a:xfrm>
           <a:prstGeom prst="roundRect">
@@ -12764,7 +13956,7 @@
         </p:nvSpPr>
         <p:spPr>
           <a:xfrm>
-            <a:off x="4251960" y="2011680"/>
+            <a:off x="4251960" y="1920240"/>
             <a:ext cx="3429000" cy="1371600"/>
           </a:xfrm>
           <a:prstGeom prst="roundRect">
@@ -12835,7 +14027,7 @@
         </p:nvSpPr>
         <p:spPr>
           <a:xfrm>
-            <a:off x="7818120" y="2011680"/>
+            <a:off x="7818120" y="1920240"/>
             <a:ext cx="3429000" cy="1371600"/>
           </a:xfrm>
           <a:prstGeom prst="roundRect">
@@ -12906,7 +14098,7 @@
         </p:nvSpPr>
         <p:spPr>
           <a:xfrm>
-            <a:off x="685800" y="3566160"/>
+            <a:off x="685800" y="3474720"/>
             <a:ext cx="10561320" cy="1463040"/>
           </a:xfrm>
           <a:prstGeom prst="roundRect">
@@ -13160,7 +14352,7 @@
         <p:spPr>
           <a:xfrm>
             <a:off x="685800" y="1554480"/>
-            <a:ext cx="10789920" cy="457200"/>
+            <a:ext cx="10789920" cy="365760"/>
           </a:xfrm>
           <a:prstGeom prst="rect">
             <a:avLst/>
@@ -13198,7 +14390,7 @@
         </p:nvSpPr>
         <p:spPr>
           <a:xfrm>
-            <a:off x="685800" y="2011680"/>
+            <a:off x="685800" y="1920240"/>
             <a:ext cx="2514600" cy="1188720"/>
           </a:xfrm>
           <a:prstGeom prst="roundRect">
@@ -13269,7 +14461,7 @@
         </p:nvSpPr>
         <p:spPr>
           <a:xfrm>
-            <a:off x="3337560" y="2011680"/>
+            <a:off x="3337560" y="1920240"/>
             <a:ext cx="2514600" cy="1188720"/>
           </a:xfrm>
           <a:prstGeom prst="roundRect">
@@ -13340,7 +14532,7 @@
         </p:nvSpPr>
         <p:spPr>
           <a:xfrm>
-            <a:off x="5989320" y="2011680"/>
+            <a:off x="5989320" y="1920240"/>
             <a:ext cx="2514600" cy="1188720"/>
           </a:xfrm>
           <a:prstGeom prst="roundRect">
@@ -13411,7 +14603,7 @@
         </p:nvSpPr>
         <p:spPr>
           <a:xfrm>
-            <a:off x="8641080" y="2011680"/>
+            <a:off x="8641080" y="1920240"/>
             <a:ext cx="2514600" cy="1188720"/>
           </a:xfrm>
           <a:prstGeom prst="roundRect">
@@ -13482,7 +14674,7 @@
         </p:nvSpPr>
         <p:spPr>
           <a:xfrm>
-            <a:off x="685800" y="3383280"/>
+            <a:off x="685800" y="3291840"/>
             <a:ext cx="10561320" cy="1737360"/>
           </a:xfrm>
           <a:prstGeom prst="roundRect">
@@ -13751,7 +14943,7 @@
         <p:spPr>
           <a:xfrm>
             <a:off x="685800" y="1554480"/>
-            <a:ext cx="10789920" cy="457200"/>
+            <a:ext cx="10789920" cy="365760"/>
           </a:xfrm>
           <a:prstGeom prst="rect">
             <a:avLst/>
@@ -13789,7 +14981,7 @@
         </p:nvSpPr>
         <p:spPr>
           <a:xfrm>
-            <a:off x="685800" y="2011680"/>
+            <a:off x="685800" y="1920240"/>
             <a:ext cx="10561320" cy="2011680"/>
           </a:xfrm>
           <a:prstGeom prst="roundRect">
@@ -13890,7 +15082,7 @@
         </p:nvSpPr>
         <p:spPr>
           <a:xfrm>
-            <a:off x="685800" y="4206240"/>
+            <a:off x="685800" y="4114800"/>
             <a:ext cx="10561320" cy="457200"/>
           </a:xfrm>
           <a:prstGeom prst="rect">
@@ -14082,7 +15274,7 @@
         <p:spPr>
           <a:xfrm>
             <a:off x="685800" y="1554480"/>
-            <a:ext cx="10789920" cy="457200"/>
+            <a:ext cx="10789920" cy="365760"/>
           </a:xfrm>
           <a:prstGeom prst="rect">
             <a:avLst/>
@@ -14121,7 +15313,7 @@
           <p:nvPr/>
         </p:nvGraphicFramePr>
         <p:xfrm>
-          <a:off x="685800" y="2011680"/>
+          <a:off x="685800" y="1920240"/>
           <a:ext cx="10561320" cy="1463040"/>
         </p:xfrm>
         <a:graphic>
@@ -14417,7 +15609,7 @@
         </p:nvSpPr>
         <p:spPr>
           <a:xfrm>
-            <a:off x="685800" y="3657600"/>
+            <a:off x="685800" y="3566160"/>
             <a:ext cx="10561320" cy="1463040"/>
           </a:xfrm>
           <a:prstGeom prst="roundRect">
@@ -14686,7 +15878,7 @@
         <p:spPr>
           <a:xfrm>
             <a:off x="685800" y="1554480"/>
-            <a:ext cx="10789920" cy="457200"/>
+            <a:ext cx="10789920" cy="365760"/>
           </a:xfrm>
           <a:prstGeom prst="rect">
             <a:avLst/>
@@ -14724,7 +15916,7 @@
         </p:nvSpPr>
         <p:spPr>
           <a:xfrm>
-            <a:off x="685800" y="2011680"/>
+            <a:off x="685800" y="1920240"/>
             <a:ext cx="5120640" cy="2743200"/>
           </a:xfrm>
           <a:prstGeom prst="roundRect">
@@ -14855,7 +16047,7 @@
         </p:nvSpPr>
         <p:spPr>
           <a:xfrm>
-            <a:off x="5989320" y="2011680"/>
+            <a:off x="5989320" y="1920240"/>
             <a:ext cx="5486400" cy="2743200"/>
           </a:xfrm>
           <a:prstGeom prst="roundRect">
@@ -15139,7 +16331,7 @@
         <p:spPr>
           <a:xfrm>
             <a:off x="685800" y="1554480"/>
-            <a:ext cx="10789920" cy="457200"/>
+            <a:ext cx="10789920" cy="365760"/>
           </a:xfrm>
           <a:prstGeom prst="rect">
             <a:avLst/>
@@ -15177,7 +16369,7 @@
         </p:nvSpPr>
         <p:spPr>
           <a:xfrm>
-            <a:off x="685800" y="2011680"/>
+            <a:off x="685800" y="1920240"/>
             <a:ext cx="2514600" cy="1005840"/>
           </a:xfrm>
           <a:prstGeom prst="roundRect">
@@ -15233,7 +16425,7 @@
         </p:nvSpPr>
         <p:spPr>
           <a:xfrm>
-            <a:off x="3337560" y="2011680"/>
+            <a:off x="3337560" y="1920240"/>
             <a:ext cx="2514600" cy="1005840"/>
           </a:xfrm>
           <a:prstGeom prst="roundRect">
@@ -15304,7 +16496,7 @@
         </p:nvSpPr>
         <p:spPr>
           <a:xfrm>
-            <a:off x="5989320" y="2011680"/>
+            <a:off x="5989320" y="1920240"/>
             <a:ext cx="2514600" cy="1005840"/>
           </a:xfrm>
           <a:prstGeom prst="roundRect">
@@ -15360,7 +16552,7 @@
         </p:nvSpPr>
         <p:spPr>
           <a:xfrm>
-            <a:off x="8641080" y="2011680"/>
+            <a:off x="8641080" y="1920240"/>
             <a:ext cx="2514600" cy="1005840"/>
           </a:xfrm>
           <a:prstGeom prst="roundRect">
@@ -15431,7 +16623,7 @@
         </p:nvSpPr>
         <p:spPr>
           <a:xfrm>
-            <a:off x="685800" y="3200400"/>
+            <a:off x="685800" y="3108960"/>
             <a:ext cx="10561320" cy="1828800"/>
           </a:xfrm>
           <a:prstGeom prst="roundRect">
